--- a/working_files_and_media/logo_ideas.pptx
+++ b/working_files_and_media/logo_ideas.pptx
@@ -4049,7 +4049,7 @@
         <p:spPr>
           <a:xfrm>
             <a:off x="647350" y="413363"/>
-            <a:ext cx="10433304" cy="4709160"/>
+            <a:ext cx="6123600" cy="1209600"/>
           </a:xfrm>
           <a:prstGeom prst="rect">
             <a:avLst/>
@@ -4101,7 +4101,7 @@
         </p:nvSpPr>
         <p:spPr>
           <a:xfrm>
-            <a:off x="2457512" y="2767943"/>
+            <a:off x="1112681" y="1253631"/>
             <a:ext cx="5001768" cy="369332"/>
           </a:xfrm>
           <a:prstGeom prst="rect">
@@ -4148,7 +4148,7 @@
         </p:nvSpPr>
         <p:spPr>
           <a:xfrm>
-            <a:off x="2423160" y="2077258"/>
+            <a:off x="1078329" y="562946"/>
             <a:ext cx="5001768" cy="830997"/>
           </a:xfrm>
           <a:prstGeom prst="rect">
@@ -4209,44 +4209,8 @@
         </p:blipFill>
         <p:spPr>
           <a:xfrm>
-            <a:off x="7188740" y="2210234"/>
+            <a:off x="5843909" y="695922"/>
             <a:ext cx="927041" cy="927041"/>
-          </a:xfrm>
-          <a:prstGeom prst="rect">
-            <a:avLst/>
-          </a:prstGeom>
-        </p:spPr>
-      </p:pic>
-      <p:pic>
-        <p:nvPicPr>
-          <p:cNvPr id="15" name="Picture 14" descr="A green and orange text&#10;&#10;AI-generated content may be incorrect.">
-            <a:extLst>
-              <a:ext uri="{FF2B5EF4-FFF2-40B4-BE49-F238E27FC236}">
-                <a16:creationId xmlns:a16="http://schemas.microsoft.com/office/drawing/2014/main" id="{6B6C5CB3-BCC0-02DF-9C64-4861DB46E6C2}"/>
-              </a:ext>
-            </a:extLst>
-          </p:cNvPr>
-          <p:cNvPicPr>
-            <a:picLocks noChangeAspect="1"/>
-          </p:cNvPicPr>
-          <p:nvPr/>
-        </p:nvPicPr>
-        <p:blipFill>
-          <a:blip r:embed="rId3">
-            <a:extLst>
-              <a:ext uri="{28A0092B-C50C-407E-A947-70E740481C1C}">
-                <a14:useLocalDpi xmlns:a14="http://schemas.microsoft.com/office/drawing/2010/main" val="0"/>
-              </a:ext>
-            </a:extLst>
-          </a:blip>
-          <a:stretch>
-            <a:fillRect/>
-          </a:stretch>
-        </p:blipFill>
-        <p:spPr>
-          <a:xfrm>
-            <a:off x="647350" y="5174944"/>
-            <a:ext cx="5506218" cy="1276528"/>
           </a:xfrm>
           <a:prstGeom prst="rect">
             <a:avLst/>

--- a/working_files_and_media/logo_ideas.pptx
+++ b/working_files_and_media/logo_ideas.pptx
@@ -4057,6 +4057,9 @@
           <a:solidFill>
             <a:srgbClr val="404040"/>
           </a:solidFill>
+          <a:ln>
+            <a:noFill/>
+          </a:ln>
         </p:spPr>
         <p:style>
           <a:lnRef idx="2">
@@ -4209,7 +4212,7 @@
         </p:blipFill>
         <p:spPr>
           <a:xfrm>
-            <a:off x="5843909" y="695922"/>
+            <a:off x="5826657" y="678670"/>
             <a:ext cx="927041" cy="927041"/>
           </a:xfrm>
           <a:prstGeom prst="rect">

--- a/working_files_and_media/logo_ideas.pptx
+++ b/working_files_and_media/logo_ideas.pptx
@@ -4220,6 +4220,156 @@
           </a:prstGeom>
         </p:spPr>
       </p:pic>
+      <p:sp>
+        <p:nvSpPr>
+          <p:cNvPr id="2" name="Rectangle 1">
+            <a:extLst>
+              <a:ext uri="{FF2B5EF4-FFF2-40B4-BE49-F238E27FC236}">
+                <a16:creationId xmlns:a16="http://schemas.microsoft.com/office/drawing/2014/main" id="{DFDC2644-17B4-15DB-C1F8-CA9A53098EF2}"/>
+              </a:ext>
+            </a:extLst>
+          </p:cNvPr>
+          <p:cNvSpPr/>
+          <p:nvPr/>
+        </p:nvSpPr>
+        <p:spPr>
+          <a:xfrm>
+            <a:off x="646564" y="1830687"/>
+            <a:ext cx="6123600" cy="1209600"/>
+          </a:xfrm>
+          <a:prstGeom prst="rect">
+            <a:avLst/>
+          </a:prstGeom>
+          <a:solidFill>
+            <a:srgbClr val="404040"/>
+          </a:solidFill>
+          <a:ln>
+            <a:noFill/>
+          </a:ln>
+        </p:spPr>
+        <p:style>
+          <a:lnRef idx="2">
+            <a:schemeClr val="accent1">
+              <a:shade val="15000"/>
+            </a:schemeClr>
+          </a:lnRef>
+          <a:fillRef idx="1">
+            <a:schemeClr val="accent1"/>
+          </a:fillRef>
+          <a:effectRef idx="0">
+            <a:schemeClr val="accent1"/>
+          </a:effectRef>
+          <a:fontRef idx="minor">
+            <a:schemeClr val="lt1"/>
+          </a:fontRef>
+        </p:style>
+        <p:txBody>
+          <a:bodyPr rtlCol="0" anchor="ctr"/>
+          <a:lstStyle/>
+          <a:p>
+            <a:pPr algn="ctr"/>
+            <a:endParaRPr lang="en-GB">
+              <a:solidFill>
+                <a:srgbClr val="FF0000"/>
+              </a:solidFill>
+            </a:endParaRPr>
+          </a:p>
+        </p:txBody>
+      </p:sp>
+      <p:sp>
+        <p:nvSpPr>
+          <p:cNvPr id="3" name="TextBox 2">
+            <a:extLst>
+              <a:ext uri="{FF2B5EF4-FFF2-40B4-BE49-F238E27FC236}">
+                <a16:creationId xmlns:a16="http://schemas.microsoft.com/office/drawing/2014/main" id="{09BC9F9F-9A47-CFC9-D65E-E97F68D11BD1}"/>
+              </a:ext>
+            </a:extLst>
+          </p:cNvPr>
+          <p:cNvSpPr txBox="1"/>
+          <p:nvPr/>
+        </p:nvSpPr>
+        <p:spPr>
+          <a:xfrm>
+            <a:off x="646564" y="2670955"/>
+            <a:ext cx="6123600" cy="369332"/>
+          </a:xfrm>
+          <a:prstGeom prst="rect">
+            <a:avLst/>
+          </a:prstGeom>
+          <a:noFill/>
+        </p:spPr>
+        <p:txBody>
+          <a:bodyPr wrap="square" rtlCol="0">
+            <a:spAutoFit/>
+          </a:bodyPr>
+          <a:lstStyle/>
+          <a:p>
+            <a:pPr algn="ctr"/>
+            <a:r>
+              <a:rPr lang="en-US" b="1" dirty="0">
+                <a:solidFill>
+                  <a:srgbClr val="F0870F"/>
+                </a:solidFill>
+                <a:latin typeface="Trade Gothic Next Heavy" panose="020B0903040303020004" pitchFamily="34" charset="0"/>
+              </a:rPr>
+              <a:t>C#, JavaScript, Next.js, React, PHP, SQL</a:t>
+            </a:r>
+            <a:endParaRPr lang="en-GB" b="1" dirty="0">
+              <a:solidFill>
+                <a:srgbClr val="F0870F"/>
+              </a:solidFill>
+              <a:latin typeface="Trade Gothic Next Heavy" panose="020B0903040303020004" pitchFamily="34" charset="0"/>
+            </a:endParaRPr>
+          </a:p>
+        </p:txBody>
+      </p:sp>
+      <p:sp>
+        <p:nvSpPr>
+          <p:cNvPr id="4" name="TextBox 3">
+            <a:extLst>
+              <a:ext uri="{FF2B5EF4-FFF2-40B4-BE49-F238E27FC236}">
+                <a16:creationId xmlns:a16="http://schemas.microsoft.com/office/drawing/2014/main" id="{734D4AAD-4E92-54A3-5E63-7912345374EC}"/>
+              </a:ext>
+            </a:extLst>
+          </p:cNvPr>
+          <p:cNvSpPr txBox="1"/>
+          <p:nvPr/>
+        </p:nvSpPr>
+        <p:spPr>
+          <a:xfrm>
+            <a:off x="646564" y="1980270"/>
+            <a:ext cx="6123600" cy="830997"/>
+          </a:xfrm>
+          <a:prstGeom prst="rect">
+            <a:avLst/>
+          </a:prstGeom>
+          <a:noFill/>
+        </p:spPr>
+        <p:txBody>
+          <a:bodyPr wrap="square" rtlCol="0">
+            <a:spAutoFit/>
+          </a:bodyPr>
+          <a:lstStyle/>
+          <a:p>
+            <a:pPr algn="ctr"/>
+            <a:r>
+              <a:rPr lang="en-US" sz="4800" b="1" dirty="0">
+                <a:solidFill>
+                  <a:srgbClr val="96B946"/>
+                </a:solidFill>
+                <a:latin typeface="Trade Gothic Next Heavy" panose="020B0903040303020004" pitchFamily="34" charset="0"/>
+              </a:rPr>
+              <a:t>Phil Henning</a:t>
+            </a:r>
+            <a:endParaRPr lang="en-GB" sz="4800" b="1" dirty="0">
+              <a:solidFill>
+                <a:srgbClr val="96B946"/>
+              </a:solidFill>
+              <a:latin typeface="Trade Gothic Next Heavy" panose="020B0903040303020004" pitchFamily="34" charset="0"/>
+            </a:endParaRPr>
+          </a:p>
+        </p:txBody>
+      </p:sp>
     </p:spTree>
     <p:extLst>
       <p:ext uri="{BB962C8B-B14F-4D97-AF65-F5344CB8AC3E}">

--- a/working_files_and_media/logo_ideas.pptx
+++ b/working_files_and_media/logo_ideas.pptx
@@ -4370,6 +4370,156 @@
           </a:p>
         </p:txBody>
       </p:sp>
+      <p:sp>
+        <p:nvSpPr>
+          <p:cNvPr id="8" name="Rectangle 7">
+            <a:extLst>
+              <a:ext uri="{FF2B5EF4-FFF2-40B4-BE49-F238E27FC236}">
+                <a16:creationId xmlns:a16="http://schemas.microsoft.com/office/drawing/2014/main" id="{9DA20FF1-2BF7-9F9D-B7C4-70901C5CAA62}"/>
+              </a:ext>
+            </a:extLst>
+          </p:cNvPr>
+          <p:cNvSpPr/>
+          <p:nvPr/>
+        </p:nvSpPr>
+        <p:spPr>
+          <a:xfrm>
+            <a:off x="630098" y="3252632"/>
+            <a:ext cx="6123600" cy="1209600"/>
+          </a:xfrm>
+          <a:prstGeom prst="rect">
+            <a:avLst/>
+          </a:prstGeom>
+          <a:solidFill>
+            <a:srgbClr val="404040"/>
+          </a:solidFill>
+          <a:ln>
+            <a:noFill/>
+          </a:ln>
+        </p:spPr>
+        <p:style>
+          <a:lnRef idx="2">
+            <a:schemeClr val="accent1">
+              <a:shade val="15000"/>
+            </a:schemeClr>
+          </a:lnRef>
+          <a:fillRef idx="1">
+            <a:schemeClr val="accent1"/>
+          </a:fillRef>
+          <a:effectRef idx="0">
+            <a:schemeClr val="accent1"/>
+          </a:effectRef>
+          <a:fontRef idx="minor">
+            <a:schemeClr val="lt1"/>
+          </a:fontRef>
+        </p:style>
+        <p:txBody>
+          <a:bodyPr rtlCol="0" anchor="ctr"/>
+          <a:lstStyle/>
+          <a:p>
+            <a:pPr algn="r"/>
+            <a:endParaRPr lang="en-GB" sz="1400">
+              <a:solidFill>
+                <a:srgbClr val="FF0000"/>
+              </a:solidFill>
+            </a:endParaRPr>
+          </a:p>
+        </p:txBody>
+      </p:sp>
+      <p:sp>
+        <p:nvSpPr>
+          <p:cNvPr id="9" name="TextBox 8">
+            <a:extLst>
+              <a:ext uri="{FF2B5EF4-FFF2-40B4-BE49-F238E27FC236}">
+                <a16:creationId xmlns:a16="http://schemas.microsoft.com/office/drawing/2014/main" id="{179D9F4E-EBC7-E087-94CB-4BF05EF8DE37}"/>
+              </a:ext>
+            </a:extLst>
+          </p:cNvPr>
+          <p:cNvSpPr txBox="1"/>
+          <p:nvPr/>
+        </p:nvSpPr>
+        <p:spPr>
+          <a:xfrm>
+            <a:off x="630098" y="4116613"/>
+            <a:ext cx="6123600" cy="307777"/>
+          </a:xfrm>
+          <a:prstGeom prst="rect">
+            <a:avLst/>
+          </a:prstGeom>
+          <a:noFill/>
+        </p:spPr>
+        <p:txBody>
+          <a:bodyPr wrap="square" rtlCol="0">
+            <a:spAutoFit/>
+          </a:bodyPr>
+          <a:lstStyle/>
+          <a:p>
+            <a:pPr algn="r"/>
+            <a:r>
+              <a:rPr lang="en-US" sz="1400" b="1" dirty="0">
+                <a:solidFill>
+                  <a:srgbClr val="F0870F"/>
+                </a:solidFill>
+                <a:latin typeface="Trade Gothic Next Heavy" panose="020B0903040303020004" pitchFamily="34" charset="0"/>
+              </a:rPr>
+              <a:t>C#, JavaScript, Next.js, React, PHP, SQL</a:t>
+            </a:r>
+            <a:endParaRPr lang="en-GB" sz="1400" b="1" dirty="0">
+              <a:solidFill>
+                <a:srgbClr val="F0870F"/>
+              </a:solidFill>
+              <a:latin typeface="Trade Gothic Next Heavy" panose="020B0903040303020004" pitchFamily="34" charset="0"/>
+            </a:endParaRPr>
+          </a:p>
+        </p:txBody>
+      </p:sp>
+      <p:sp>
+        <p:nvSpPr>
+          <p:cNvPr id="10" name="TextBox 9">
+            <a:extLst>
+              <a:ext uri="{FF2B5EF4-FFF2-40B4-BE49-F238E27FC236}">
+                <a16:creationId xmlns:a16="http://schemas.microsoft.com/office/drawing/2014/main" id="{51A8E117-20BD-FC61-F39E-599499FD7456}"/>
+              </a:ext>
+            </a:extLst>
+          </p:cNvPr>
+          <p:cNvSpPr txBox="1"/>
+          <p:nvPr/>
+        </p:nvSpPr>
+        <p:spPr>
+          <a:xfrm>
+            <a:off x="630098" y="3522254"/>
+            <a:ext cx="6123600" cy="707886"/>
+          </a:xfrm>
+          <a:prstGeom prst="rect">
+            <a:avLst/>
+          </a:prstGeom>
+          <a:noFill/>
+        </p:spPr>
+        <p:txBody>
+          <a:bodyPr wrap="square" rtlCol="0">
+            <a:spAutoFit/>
+          </a:bodyPr>
+          <a:lstStyle/>
+          <a:p>
+            <a:pPr algn="r"/>
+            <a:r>
+              <a:rPr lang="en-US" sz="4000" b="1" dirty="0">
+                <a:solidFill>
+                  <a:srgbClr val="96B946"/>
+                </a:solidFill>
+                <a:latin typeface="Trade Gothic Next Heavy" panose="020B0903040303020004" pitchFamily="34" charset="0"/>
+              </a:rPr>
+              <a:t>Phil Henning</a:t>
+            </a:r>
+            <a:endParaRPr lang="en-GB" sz="4000" b="1" dirty="0">
+              <a:solidFill>
+                <a:srgbClr val="96B946"/>
+              </a:solidFill>
+              <a:latin typeface="Trade Gothic Next Heavy" panose="020B0903040303020004" pitchFamily="34" charset="0"/>
+            </a:endParaRPr>
+          </a:p>
+        </p:txBody>
+      </p:sp>
     </p:spTree>
     <p:extLst>
       <p:ext uri="{BB962C8B-B14F-4D97-AF65-F5344CB8AC3E}">

--- a/working_files_and_media/logo_ideas.pptx
+++ b/working_files_and_media/logo_ideas.pptx
@@ -4385,7 +4385,7 @@
         <p:spPr>
           <a:xfrm>
             <a:off x="630098" y="3252632"/>
-            <a:ext cx="6123600" cy="1209600"/>
+            <a:ext cx="5296249" cy="1209600"/>
           </a:xfrm>
           <a:prstGeom prst="rect">
             <a:avLst/>
@@ -4440,8 +4440,8 @@
         </p:nvSpPr>
         <p:spPr>
           <a:xfrm>
-            <a:off x="630098" y="4116613"/>
-            <a:ext cx="6123600" cy="307777"/>
+            <a:off x="625294" y="4142491"/>
+            <a:ext cx="5296249" cy="307777"/>
           </a:xfrm>
           <a:prstGeom prst="rect">
             <a:avLst/>
@@ -4487,8 +4487,8 @@
         </p:nvSpPr>
         <p:spPr>
           <a:xfrm>
-            <a:off x="630098" y="3522254"/>
-            <a:ext cx="6123600" cy="707886"/>
+            <a:off x="625294" y="3565384"/>
+            <a:ext cx="5296249" cy="707886"/>
           </a:xfrm>
           <a:prstGeom prst="rect">
             <a:avLst/>

--- a/working_files_and_media/logo_ideas.pptx
+++ b/working_files_and_media/logo_ideas.pptx
@@ -7,8 +7,7 @@
   <p:sldIdLst>
     <p:sldId id="256" r:id="rId2"/>
     <p:sldId id="257" r:id="rId3"/>
-    <p:sldId id="260" r:id="rId4"/>
-    <p:sldId id="258" r:id="rId5"/>
+    <p:sldId id="258" r:id="rId4"/>
   </p:sldIdLst>
   <p:sldSz cx="12192000" cy="6858000"/>
   <p:notesSz cx="6858000" cy="9144000"/>
@@ -371,7 +370,7 @@
           <a:p>
             <a:fld id="{846CE7D5-CF57-46EF-B807-FDD0502418D4}" type="datetimeFigureOut">
               <a:rPr lang="en-US" smtClean="0"/>
-              <a:t>4/28/2025</a:t>
+              <a:t>5/17/2025</a:t>
             </a:fld>
             <a:endParaRPr lang="en-US"/>
           </a:p>
@@ -541,7 +540,7 @@
           <a:p>
             <a:fld id="{846CE7D5-CF57-46EF-B807-FDD0502418D4}" type="datetimeFigureOut">
               <a:rPr lang="en-US" smtClean="0"/>
-              <a:t>4/28/2025</a:t>
+              <a:t>5/17/2025</a:t>
             </a:fld>
             <a:endParaRPr lang="en-US"/>
           </a:p>
@@ -721,7 +720,7 @@
           <a:p>
             <a:fld id="{846CE7D5-CF57-46EF-B807-FDD0502418D4}" type="datetimeFigureOut">
               <a:rPr lang="en-US" smtClean="0"/>
-              <a:t>4/28/2025</a:t>
+              <a:t>5/17/2025</a:t>
             </a:fld>
             <a:endParaRPr lang="en-US"/>
           </a:p>
@@ -891,7 +890,7 @@
           <a:p>
             <a:fld id="{846CE7D5-CF57-46EF-B807-FDD0502418D4}" type="datetimeFigureOut">
               <a:rPr lang="en-US" smtClean="0"/>
-              <a:t>4/28/2025</a:t>
+              <a:t>5/17/2025</a:t>
             </a:fld>
             <a:endParaRPr lang="en-US"/>
           </a:p>
@@ -1137,7 +1136,7 @@
           <a:p>
             <a:fld id="{846CE7D5-CF57-46EF-B807-FDD0502418D4}" type="datetimeFigureOut">
               <a:rPr lang="en-US" smtClean="0"/>
-              <a:t>4/28/2025</a:t>
+              <a:t>5/17/2025</a:t>
             </a:fld>
             <a:endParaRPr lang="en-US"/>
           </a:p>
@@ -1369,7 +1368,7 @@
           <a:p>
             <a:fld id="{846CE7D5-CF57-46EF-B807-FDD0502418D4}" type="datetimeFigureOut">
               <a:rPr lang="en-US" smtClean="0"/>
-              <a:t>4/28/2025</a:t>
+              <a:t>5/17/2025</a:t>
             </a:fld>
             <a:endParaRPr lang="en-US"/>
           </a:p>
@@ -1736,7 +1735,7 @@
           <a:p>
             <a:fld id="{846CE7D5-CF57-46EF-B807-FDD0502418D4}" type="datetimeFigureOut">
               <a:rPr lang="en-US" smtClean="0"/>
-              <a:t>4/28/2025</a:t>
+              <a:t>5/17/2025</a:t>
             </a:fld>
             <a:endParaRPr lang="en-US"/>
           </a:p>
@@ -1854,7 +1853,7 @@
           <a:p>
             <a:fld id="{846CE7D5-CF57-46EF-B807-FDD0502418D4}" type="datetimeFigureOut">
               <a:rPr lang="en-US" smtClean="0"/>
-              <a:t>4/28/2025</a:t>
+              <a:t>5/17/2025</a:t>
             </a:fld>
             <a:endParaRPr lang="en-US"/>
           </a:p>
@@ -1949,7 +1948,7 @@
           <a:p>
             <a:fld id="{846CE7D5-CF57-46EF-B807-FDD0502418D4}" type="datetimeFigureOut">
               <a:rPr lang="en-US" smtClean="0"/>
-              <a:t>4/28/2025</a:t>
+              <a:t>5/17/2025</a:t>
             </a:fld>
             <a:endParaRPr lang="en-US"/>
           </a:p>
@@ -2226,7 +2225,7 @@
           <a:p>
             <a:fld id="{846CE7D5-CF57-46EF-B807-FDD0502418D4}" type="datetimeFigureOut">
               <a:rPr lang="en-US" smtClean="0"/>
-              <a:t>4/28/2025</a:t>
+              <a:t>5/17/2025</a:t>
             </a:fld>
             <a:endParaRPr lang="en-US"/>
           </a:p>
@@ -2483,7 +2482,7 @@
           <a:p>
             <a:fld id="{846CE7D5-CF57-46EF-B807-FDD0502418D4}" type="datetimeFigureOut">
               <a:rPr lang="en-US" smtClean="0"/>
-              <a:t>4/28/2025</a:t>
+              <a:t>5/17/2025</a:t>
             </a:fld>
             <a:endParaRPr lang="en-US"/>
           </a:p>
@@ -2696,7 +2695,7 @@
           <a:p>
             <a:fld id="{846CE7D5-CF57-46EF-B807-FDD0502418D4}" type="datetimeFigureOut">
               <a:rPr lang="en-US" smtClean="0"/>
-              <a:t>4/28/2025</a:t>
+              <a:t>5/17/2025</a:t>
             </a:fld>
             <a:endParaRPr lang="en-US"/>
           </a:p>
@@ -3578,464 +3577,6 @@
       </p:grpSpPr>
       <p:sp>
         <p:nvSpPr>
-          <p:cNvPr id="4" name="Rectangle 3">
-            <a:extLst>
-              <a:ext uri="{FF2B5EF4-FFF2-40B4-BE49-F238E27FC236}">
-                <a16:creationId xmlns:a16="http://schemas.microsoft.com/office/drawing/2014/main" id="{77D64441-BB92-FCE8-C1A1-578D70C37630}"/>
-              </a:ext>
-            </a:extLst>
-          </p:cNvPr>
-          <p:cNvSpPr/>
-          <p:nvPr/>
-        </p:nvSpPr>
-        <p:spPr>
-          <a:xfrm>
-            <a:off x="647350" y="329533"/>
-            <a:ext cx="10433304" cy="4709160"/>
-          </a:xfrm>
-          <a:prstGeom prst="rect">
-            <a:avLst/>
-          </a:prstGeom>
-          <a:solidFill>
-            <a:srgbClr val="404040"/>
-          </a:solidFill>
-        </p:spPr>
-        <p:style>
-          <a:lnRef idx="2">
-            <a:schemeClr val="accent1">
-              <a:shade val="15000"/>
-            </a:schemeClr>
-          </a:lnRef>
-          <a:fillRef idx="1">
-            <a:schemeClr val="accent1"/>
-          </a:fillRef>
-          <a:effectRef idx="0">
-            <a:schemeClr val="accent1"/>
-          </a:effectRef>
-          <a:fontRef idx="minor">
-            <a:schemeClr val="lt1"/>
-          </a:fontRef>
-        </p:style>
-        <p:txBody>
-          <a:bodyPr rtlCol="0" anchor="ctr"/>
-          <a:lstStyle/>
-          <a:p>
-            <a:pPr algn="ctr"/>
-            <a:endParaRPr lang="en-GB">
-              <a:solidFill>
-                <a:srgbClr val="FF0000"/>
-              </a:solidFill>
-            </a:endParaRPr>
-          </a:p>
-        </p:txBody>
-      </p:sp>
-      <p:sp>
-        <p:nvSpPr>
-          <p:cNvPr id="6" name="TextBox 5">
-            <a:extLst>
-              <a:ext uri="{FF2B5EF4-FFF2-40B4-BE49-F238E27FC236}">
-                <a16:creationId xmlns:a16="http://schemas.microsoft.com/office/drawing/2014/main" id="{7916213B-0179-1FB1-6E08-0AE687C6225F}"/>
-              </a:ext>
-            </a:extLst>
-          </p:cNvPr>
-          <p:cNvSpPr txBox="1"/>
-          <p:nvPr/>
-        </p:nvSpPr>
-        <p:spPr>
-          <a:xfrm>
-            <a:off x="2423160" y="2935050"/>
-            <a:ext cx="5001768" cy="400110"/>
-          </a:xfrm>
-          <a:prstGeom prst="rect">
-            <a:avLst/>
-          </a:prstGeom>
-          <a:noFill/>
-        </p:spPr>
-        <p:txBody>
-          <a:bodyPr wrap="square" rtlCol="0">
-            <a:spAutoFit/>
-          </a:bodyPr>
-          <a:lstStyle/>
-          <a:p>
-            <a:pPr algn="ctr"/>
-            <a:r>
-              <a:rPr lang="en-US" sz="2000" b="1" dirty="0">
-                <a:solidFill>
-                  <a:srgbClr val="F0870F"/>
-                </a:solidFill>
-                <a:latin typeface="Trade Gothic Next Heavy" panose="020B0903040303020004" pitchFamily="34" charset="0"/>
-              </a:rPr>
-              <a:t>C#, JavaScript, Next.js, React, PHP, SQL</a:t>
-            </a:r>
-            <a:endParaRPr lang="en-GB" sz="1600" b="1" dirty="0">
-              <a:solidFill>
-                <a:srgbClr val="F0870F"/>
-              </a:solidFill>
-              <a:latin typeface="Trade Gothic Next Heavy" panose="020B0903040303020004" pitchFamily="34" charset="0"/>
-            </a:endParaRPr>
-          </a:p>
-        </p:txBody>
-      </p:sp>
-      <p:sp>
-        <p:nvSpPr>
-          <p:cNvPr id="5" name="TextBox 4">
-            <a:extLst>
-              <a:ext uri="{FF2B5EF4-FFF2-40B4-BE49-F238E27FC236}">
-                <a16:creationId xmlns:a16="http://schemas.microsoft.com/office/drawing/2014/main" id="{878141FD-629D-A611-4FF3-AA2F0392F4C1}"/>
-              </a:ext>
-            </a:extLst>
-          </p:cNvPr>
-          <p:cNvSpPr txBox="1"/>
-          <p:nvPr/>
-        </p:nvSpPr>
-        <p:spPr>
-          <a:xfrm>
-            <a:off x="2423160" y="2077258"/>
-            <a:ext cx="5001768" cy="1015663"/>
-          </a:xfrm>
-          <a:prstGeom prst="rect">
-            <a:avLst/>
-          </a:prstGeom>
-          <a:noFill/>
-        </p:spPr>
-        <p:txBody>
-          <a:bodyPr wrap="square" rtlCol="0">
-            <a:spAutoFit/>
-          </a:bodyPr>
-          <a:lstStyle/>
-          <a:p>
-            <a:pPr algn="ctr"/>
-            <a:r>
-              <a:rPr lang="en-US" sz="6000" b="1" dirty="0">
-                <a:solidFill>
-                  <a:srgbClr val="96B946"/>
-                </a:solidFill>
-                <a:latin typeface="Trade Gothic Next Heavy" panose="020B0903040303020004" pitchFamily="34" charset="0"/>
-              </a:rPr>
-              <a:t>Phil Henning</a:t>
-            </a:r>
-            <a:endParaRPr lang="en-GB" b="1" dirty="0">
-              <a:solidFill>
-                <a:srgbClr val="96B946"/>
-              </a:solidFill>
-              <a:latin typeface="Trade Gothic Next Heavy" panose="020B0903040303020004" pitchFamily="34" charset="0"/>
-            </a:endParaRPr>
-          </a:p>
-        </p:txBody>
-      </p:sp>
-      <p:sp>
-        <p:nvSpPr>
-          <p:cNvPr id="13" name="Left Brace 12">
-            <a:extLst>
-              <a:ext uri="{FF2B5EF4-FFF2-40B4-BE49-F238E27FC236}">
-                <a16:creationId xmlns:a16="http://schemas.microsoft.com/office/drawing/2014/main" id="{18A6729A-8995-112C-0D5D-4841337B01ED}"/>
-              </a:ext>
-            </a:extLst>
-          </p:cNvPr>
-          <p:cNvSpPr/>
-          <p:nvPr/>
-        </p:nvSpPr>
-        <p:spPr>
-          <a:xfrm>
-            <a:off x="7385559" y="2410870"/>
-            <a:ext cx="147443" cy="664933"/>
-          </a:xfrm>
-          <a:prstGeom prst="leftBrace">
-            <a:avLst>
-              <a:gd name="adj1" fmla="val 35402"/>
-              <a:gd name="adj2" fmla="val 49419"/>
-            </a:avLst>
-          </a:prstGeom>
-          <a:ln w="6350">
-            <a:solidFill>
-              <a:schemeClr val="bg1"/>
-            </a:solidFill>
-          </a:ln>
-        </p:spPr>
-        <p:style>
-          <a:lnRef idx="2">
-            <a:schemeClr val="accent1"/>
-          </a:lnRef>
-          <a:fillRef idx="0">
-            <a:schemeClr val="accent1"/>
-          </a:fillRef>
-          <a:effectRef idx="1">
-            <a:schemeClr val="accent1"/>
-          </a:effectRef>
-          <a:fontRef idx="minor">
-            <a:schemeClr val="tx1"/>
-          </a:fontRef>
-        </p:style>
-        <p:txBody>
-          <a:bodyPr rtlCol="0" anchor="ctr"/>
-          <a:lstStyle/>
-          <a:p>
-            <a:pPr algn="ctr"/>
-            <a:endParaRPr lang="en-GB">
-              <a:ln>
-                <a:solidFill>
-                  <a:schemeClr val="bg1"/>
-                </a:solidFill>
-              </a:ln>
-              <a:solidFill>
-                <a:schemeClr val="bg1"/>
-              </a:solidFill>
-            </a:endParaRPr>
-          </a:p>
-        </p:txBody>
-      </p:sp>
-      <p:grpSp>
-        <p:nvGrpSpPr>
-          <p:cNvPr id="11" name="Group 10">
-            <a:extLst>
-              <a:ext uri="{FF2B5EF4-FFF2-40B4-BE49-F238E27FC236}">
-                <a16:creationId xmlns:a16="http://schemas.microsoft.com/office/drawing/2014/main" id="{F6845602-38F8-44F7-81A9-5D64C3F7439F}"/>
-              </a:ext>
-            </a:extLst>
-          </p:cNvPr>
-          <p:cNvGrpSpPr/>
-          <p:nvPr/>
-        </p:nvGrpSpPr>
-        <p:grpSpPr>
-          <a:xfrm>
-            <a:off x="7686796" y="2248217"/>
-            <a:ext cx="1061568" cy="1050408"/>
-            <a:chOff x="7679437" y="2372242"/>
-            <a:chExt cx="1061568" cy="1050408"/>
-          </a:xfrm>
-        </p:grpSpPr>
-        <p:sp>
-          <p:nvSpPr>
-            <p:cNvPr id="7" name="Oval 6">
-              <a:extLst>
-                <a:ext uri="{FF2B5EF4-FFF2-40B4-BE49-F238E27FC236}">
-                  <a16:creationId xmlns:a16="http://schemas.microsoft.com/office/drawing/2014/main" id="{E2823585-FAE6-4E35-55AF-1FDF275FE7BC}"/>
-                </a:ext>
-              </a:extLst>
-            </p:cNvPr>
-            <p:cNvSpPr/>
-            <p:nvPr/>
-          </p:nvSpPr>
-          <p:spPr>
-            <a:xfrm>
-              <a:off x="7692137" y="2383198"/>
-              <a:ext cx="1032763" cy="1039452"/>
-            </a:xfrm>
-            <a:prstGeom prst="ellipse">
-              <a:avLst/>
-            </a:prstGeom>
-            <a:solidFill>
-              <a:srgbClr val="404040"/>
-            </a:solidFill>
-            <a:ln>
-              <a:solidFill>
-                <a:schemeClr val="bg1"/>
-              </a:solidFill>
-            </a:ln>
-          </p:spPr>
-          <p:style>
-            <a:lnRef idx="2">
-              <a:schemeClr val="accent1">
-                <a:shade val="15000"/>
-              </a:schemeClr>
-            </a:lnRef>
-            <a:fillRef idx="1">
-              <a:schemeClr val="accent1"/>
-            </a:fillRef>
-            <a:effectRef idx="0">
-              <a:schemeClr val="accent1"/>
-            </a:effectRef>
-            <a:fontRef idx="minor">
-              <a:schemeClr val="lt1"/>
-            </a:fontRef>
-          </p:style>
-          <p:txBody>
-            <a:bodyPr rtlCol="0" anchor="ctr"/>
-            <a:lstStyle/>
-            <a:p>
-              <a:pPr algn="ctr"/>
-              <a:endParaRPr lang="en-GB"/>
-            </a:p>
-          </p:txBody>
-        </p:sp>
-        <p:pic>
-          <p:nvPicPr>
-            <p:cNvPr id="8" name="Picture 7" descr="A person wearing sunglasses&#10;&#10;Description automatically generated">
-              <a:extLst>
-                <a:ext uri="{FF2B5EF4-FFF2-40B4-BE49-F238E27FC236}">
-                  <a16:creationId xmlns:a16="http://schemas.microsoft.com/office/drawing/2014/main" id="{8B799D0F-3603-4B90-A8A1-11378A0040E9}"/>
-                </a:ext>
-              </a:extLst>
-            </p:cNvPr>
-            <p:cNvPicPr>
-              <a:picLocks noChangeAspect="1"/>
-            </p:cNvPicPr>
-            <p:nvPr/>
-          </p:nvPicPr>
-          <p:blipFill>
-            <a:blip r:embed="rId2" cstate="print">
-              <a:extLst>
-                <a:ext uri="{BEBA8EAE-BF5A-486C-A8C5-ECC9F3942E4B}">
-                  <a14:imgProps xmlns:a14="http://schemas.microsoft.com/office/drawing/2010/main">
-                    <a14:imgLayer r:embed="rId3">
-                      <a14:imgEffect>
-                        <a14:backgroundRemoval t="3516" b="97266" l="3516" r="97656">
-                          <a14:foregroundMark x1="13672" y1="27344" x2="11719" y2="60156"/>
-                          <a14:foregroundMark x1="28125" y1="25000" x2="37891" y2="8594"/>
-                          <a14:foregroundMark x1="44141" y1="3906" x2="52344" y2="4297"/>
-                          <a14:foregroundMark x1="28516" y1="14063" x2="26953" y2="11719"/>
-                          <a14:foregroundMark x1="28516" y1="8203" x2="39063" y2="5859"/>
-                          <a14:foregroundMark x1="17969" y1="75391" x2="57422" y2="92188"/>
-                          <a14:foregroundMark x1="57422" y1="92188" x2="17969" y2="83984"/>
-                          <a14:foregroundMark x1="17969" y1="83984" x2="14453" y2="78906"/>
-                          <a14:foregroundMark x1="83984" y1="39844" x2="77734" y2="75781"/>
-                          <a14:foregroundMark x1="77734" y1="75781" x2="72656" y2="85156"/>
-                          <a14:foregroundMark x1="94141" y1="46484" x2="94141" y2="62891"/>
-                          <a14:foregroundMark x1="3516" y1="47266" x2="8984" y2="58594"/>
-                          <a14:foregroundMark x1="8203" y1="73828" x2="8203" y2="73828"/>
-                          <a14:foregroundMark x1="64063" y1="70313" x2="60938" y2="66406"/>
-                          <a14:foregroundMark x1="33984" y1="48828" x2="26953" y2="64844"/>
-                          <a14:foregroundMark x1="64063" y1="73438" x2="58203" y2="92188"/>
-                          <a14:foregroundMark x1="58203" y1="92188" x2="77344" y2="79297"/>
-                          <a14:foregroundMark x1="77344" y1="79297" x2="74609" y2="85547"/>
-                          <a14:foregroundMark x1="60156" y1="92188" x2="25000" y2="88281"/>
-                          <a14:foregroundMark x1="14063" y1="78125" x2="23828" y2="87891"/>
-                          <a14:foregroundMark x1="16016" y1="83594" x2="22266" y2="87500"/>
-                          <a14:foregroundMark x1="25391" y1="89453" x2="32031" y2="92578"/>
-                          <a14:foregroundMark x1="24609" y1="89844" x2="31250" y2="92969"/>
-                          <a14:foregroundMark x1="33984" y1="91406" x2="42188" y2="95313"/>
-                          <a14:foregroundMark x1="43359" y1="92969" x2="45703" y2="95313"/>
-                          <a14:foregroundMark x1="45703" y1="95313" x2="58594" y2="92578"/>
-                          <a14:foregroundMark x1="80078" y1="78906" x2="80078" y2="75781"/>
-                          <a14:foregroundMark x1="69922" y1="87109" x2="69922" y2="87109"/>
-                          <a14:foregroundMark x1="68359" y1="89063" x2="68359" y2="89063"/>
-                          <a14:foregroundMark x1="63672" y1="92969" x2="63672" y2="92969"/>
-                          <a14:foregroundMark x1="58984" y1="94922" x2="58984" y2="94922"/>
-                          <a14:foregroundMark x1="53125" y1="96094" x2="53125" y2="96094"/>
-                          <a14:foregroundMark x1="30469" y1="7031" x2="30469" y2="7031"/>
-                          <a14:foregroundMark x1="33203" y1="94141" x2="33203" y2="94141"/>
-                          <a14:foregroundMark x1="31641" y1="94141" x2="31641" y2="94141"/>
-                          <a14:foregroundMark x1="68359" y1="91406" x2="68359" y2="91406"/>
-                          <a14:foregroundMark x1="68750" y1="92578" x2="68750" y2="92578"/>
-                          <a14:foregroundMark x1="72266" y1="90625" x2="72266" y2="90625"/>
-                          <a14:foregroundMark x1="78516" y1="85547" x2="78516" y2="85547"/>
-                          <a14:foregroundMark x1="79297" y1="86719" x2="79297" y2="86719"/>
-                          <a14:foregroundMark x1="82422" y1="84766" x2="82422" y2="84766"/>
-                          <a14:foregroundMark x1="78125" y1="87891" x2="78125" y2="87891"/>
-                          <a14:foregroundMark x1="76953" y1="89063" x2="76953" y2="89063"/>
-                          <a14:foregroundMark x1="74609" y1="91016" x2="74609" y2="91016"/>
-                          <a14:foregroundMark x1="64453" y1="95703" x2="64453" y2="95703"/>
-                          <a14:foregroundMark x1="50000" y1="97656" x2="50000" y2="97656"/>
-                          <a14:foregroundMark x1="97656" y1="49219" x2="97656" y2="49219"/>
-                          <a14:backgroundMark x1="32813" y1="97266" x2="32813" y2="97266"/>
-                          <a14:backgroundMark x1="65234" y1="97266" x2="65234" y2="97266"/>
-                          <a14:backgroundMark x1="64453" y1="97656" x2="64453" y2="97656"/>
-                          <a14:backgroundMark x1="63281" y1="98047" x2="63281" y2="98047"/>
-                          <a14:backgroundMark x1="62500" y1="97656" x2="62500" y2="97656"/>
-                          <a14:backgroundMark x1="61719" y1="98047" x2="61719" y2="98047"/>
-                        </a14:backgroundRemoval>
-                      </a14:imgEffect>
-                    </a14:imgLayer>
-                  </a14:imgProps>
-                </a:ext>
-                <a:ext uri="{28A0092B-C50C-407E-A947-70E740481C1C}">
-                  <a14:useLocalDpi xmlns:a14="http://schemas.microsoft.com/office/drawing/2010/main" val="0"/>
-                </a:ext>
-              </a:extLst>
-            </a:blip>
-            <a:srcRect b="2084"/>
-            <a:stretch/>
-          </p:blipFill>
-          <p:spPr>
-            <a:xfrm>
-              <a:off x="7679437" y="2372242"/>
-              <a:ext cx="1061568" cy="1039452"/>
-            </a:xfrm>
-            <a:prstGeom prst="rect">
-              <a:avLst/>
-            </a:prstGeom>
-          </p:spPr>
-        </p:pic>
-      </p:grpSp>
-      <p:pic>
-        <p:nvPicPr>
-          <p:cNvPr id="1026" name="Picture 2" descr="main logo">
-            <a:extLst>
-              <a:ext uri="{FF2B5EF4-FFF2-40B4-BE49-F238E27FC236}">
-                <a16:creationId xmlns:a16="http://schemas.microsoft.com/office/drawing/2014/main" id="{A4F52202-2E60-5690-575E-9F00F7EF6C39}"/>
-              </a:ext>
-            </a:extLst>
-          </p:cNvPr>
-          <p:cNvPicPr>
-            <a:picLocks noChangeAspect="1" noChangeArrowheads="1"/>
-          </p:cNvPicPr>
-          <p:nvPr/>
-        </p:nvPicPr>
-        <p:blipFill>
-          <a:blip r:embed="rId4">
-            <a:extLst>
-              <a:ext uri="{28A0092B-C50C-407E-A947-70E740481C1C}">
-                <a14:useLocalDpi xmlns:a14="http://schemas.microsoft.com/office/drawing/2010/main" val="0"/>
-              </a:ext>
-            </a:extLst>
-          </a:blip>
-          <a:srcRect/>
-          <a:stretch>
-            <a:fillRect/>
-          </a:stretch>
-        </p:blipFill>
-        <p:spPr bwMode="auto">
-          <a:xfrm>
-            <a:off x="647350" y="5157943"/>
-            <a:ext cx="6124575" cy="1209675"/>
-          </a:xfrm>
-          <a:prstGeom prst="rect">
-            <a:avLst/>
-          </a:prstGeom>
-          <a:noFill/>
-          <a:extLst>
-            <a:ext uri="{909E8E84-426E-40DD-AFC4-6F175D3DCCD1}">
-              <a14:hiddenFill xmlns:a14="http://schemas.microsoft.com/office/drawing/2010/main">
-                <a:solidFill>
-                  <a:srgbClr val="FFFFFF"/>
-                </a:solidFill>
-              </a14:hiddenFill>
-            </a:ext>
-          </a:extLst>
-        </p:spPr>
-      </p:pic>
-    </p:spTree>
-    <p:extLst>
-      <p:ext uri="{BB962C8B-B14F-4D97-AF65-F5344CB8AC3E}">
-        <p14:creationId xmlns:p14="http://schemas.microsoft.com/office/powerpoint/2010/main" val="218486117"/>
-      </p:ext>
-    </p:extLst>
-  </p:cSld>
-  <p:clrMapOvr>
-    <a:masterClrMapping/>
-  </p:clrMapOvr>
-</p:sld>
-</file>
-
-<file path=ppt/slides/slide4.xml><?xml version="1.0" encoding="utf-8"?>
-<p:sld xmlns:a="http://schemas.openxmlformats.org/drawingml/2006/main" xmlns:r="http://schemas.openxmlformats.org/officeDocument/2006/relationships" xmlns:p="http://schemas.openxmlformats.org/presentationml/2006/main">
-  <p:cSld>
-    <p:spTree>
-      <p:nvGrpSpPr>
-        <p:cNvPr id="1" name=""/>
-        <p:cNvGrpSpPr/>
-        <p:nvPr/>
-      </p:nvGrpSpPr>
-      <p:grpSpPr>
-        <a:xfrm>
-          <a:off x="0" y="0"/>
-          <a:ext cx="0" cy="0"/>
-          <a:chOff x="0" y="0"/>
-          <a:chExt cx="0" cy="0"/>
-        </a:xfrm>
-      </p:grpSpPr>
-      <p:sp>
-        <p:nvSpPr>
           <p:cNvPr id="5" name="Rectangle 4">
             <a:extLst>
               <a:ext uri="{FF2B5EF4-FFF2-40B4-BE49-F238E27FC236}">
@@ -4514,6 +4055,183 @@
             <a:endParaRPr lang="en-GB" sz="4000" b="1" dirty="0">
               <a:solidFill>
                 <a:srgbClr val="96B946"/>
+              </a:solidFill>
+              <a:latin typeface="Trade Gothic Next Heavy" panose="020B0903040303020004" pitchFamily="34" charset="0"/>
+            </a:endParaRPr>
+          </a:p>
+        </p:txBody>
+      </p:sp>
+      <p:pic>
+        <p:nvPicPr>
+          <p:cNvPr id="11" name="Picture 10">
+            <a:extLst>
+              <a:ext uri="{FF2B5EF4-FFF2-40B4-BE49-F238E27FC236}">
+                <a16:creationId xmlns:a16="http://schemas.microsoft.com/office/drawing/2014/main" id="{CCBB2917-AD65-14F8-1A08-8BAC281EA3EB}"/>
+              </a:ext>
+            </a:extLst>
+          </p:cNvPr>
+          <p:cNvPicPr>
+            <a:picLocks noChangeAspect="1"/>
+          </p:cNvPicPr>
+          <p:nvPr/>
+        </p:nvPicPr>
+        <p:blipFill>
+          <a:blip r:embed="rId3"/>
+          <a:stretch>
+            <a:fillRect/>
+          </a:stretch>
+        </p:blipFill>
+        <p:spPr>
+          <a:xfrm>
+            <a:off x="6885455" y="1807609"/>
+            <a:ext cx="4848902" cy="1352739"/>
+          </a:xfrm>
+          <a:prstGeom prst="rect">
+            <a:avLst/>
+          </a:prstGeom>
+        </p:spPr>
+      </p:pic>
+      <p:sp>
+        <p:nvSpPr>
+          <p:cNvPr id="12" name="Rectangle 11">
+            <a:extLst>
+              <a:ext uri="{FF2B5EF4-FFF2-40B4-BE49-F238E27FC236}">
+                <a16:creationId xmlns:a16="http://schemas.microsoft.com/office/drawing/2014/main" id="{DC17DCD8-5CE1-B60B-F660-BD801700226F}"/>
+              </a:ext>
+            </a:extLst>
+          </p:cNvPr>
+          <p:cNvSpPr/>
+          <p:nvPr/>
+        </p:nvSpPr>
+        <p:spPr>
+          <a:xfrm>
+            <a:off x="7039352" y="4301381"/>
+            <a:ext cx="4845843" cy="1448817"/>
+          </a:xfrm>
+          <a:prstGeom prst="rect">
+            <a:avLst/>
+          </a:prstGeom>
+          <a:solidFill>
+            <a:srgbClr val="404040"/>
+          </a:solidFill>
+        </p:spPr>
+        <p:style>
+          <a:lnRef idx="2">
+            <a:schemeClr val="accent1">
+              <a:shade val="15000"/>
+            </a:schemeClr>
+          </a:lnRef>
+          <a:fillRef idx="1">
+            <a:schemeClr val="accent1"/>
+          </a:fillRef>
+          <a:effectRef idx="0">
+            <a:schemeClr val="accent1"/>
+          </a:effectRef>
+          <a:fontRef idx="minor">
+            <a:schemeClr val="lt1"/>
+          </a:fontRef>
+        </p:style>
+        <p:txBody>
+          <a:bodyPr rtlCol="0" anchor="ctr"/>
+          <a:lstStyle/>
+          <a:p>
+            <a:pPr algn="ctr"/>
+            <a:endParaRPr lang="en-GB">
+              <a:solidFill>
+                <a:srgbClr val="FF0000"/>
+              </a:solidFill>
+            </a:endParaRPr>
+          </a:p>
+        </p:txBody>
+      </p:sp>
+      <p:sp>
+        <p:nvSpPr>
+          <p:cNvPr id="14" name="TextBox 13">
+            <a:extLst>
+              <a:ext uri="{FF2B5EF4-FFF2-40B4-BE49-F238E27FC236}">
+                <a16:creationId xmlns:a16="http://schemas.microsoft.com/office/drawing/2014/main" id="{B36DE876-F205-0BF3-7AAE-AEDB9B923883}"/>
+              </a:ext>
+            </a:extLst>
+          </p:cNvPr>
+          <p:cNvSpPr txBox="1"/>
+          <p:nvPr/>
+        </p:nvSpPr>
+        <p:spPr>
+          <a:xfrm>
+            <a:off x="7039351" y="4517959"/>
+            <a:ext cx="4919543" cy="1015663"/>
+          </a:xfrm>
+          <a:prstGeom prst="rect">
+            <a:avLst/>
+          </a:prstGeom>
+          <a:noFill/>
+        </p:spPr>
+        <p:txBody>
+          <a:bodyPr wrap="square" rtlCol="0">
+            <a:spAutoFit/>
+          </a:bodyPr>
+          <a:lstStyle/>
+          <a:p>
+            <a:pPr algn="ctr"/>
+            <a:r>
+              <a:rPr lang="en-US" sz="6000" b="1" dirty="0">
+                <a:solidFill>
+                  <a:srgbClr val="96B946"/>
+                </a:solidFill>
+                <a:latin typeface="Trade Gothic Next Heavy" panose="020B0903040303020004" pitchFamily="34" charset="0"/>
+              </a:rPr>
+              <a:t>Phil Henning</a:t>
+            </a:r>
+            <a:endParaRPr lang="en-GB" b="1" dirty="0">
+              <a:solidFill>
+                <a:srgbClr val="96B946"/>
+              </a:solidFill>
+              <a:latin typeface="Trade Gothic Next Heavy" panose="020B0903040303020004" pitchFamily="34" charset="0"/>
+            </a:endParaRPr>
+          </a:p>
+        </p:txBody>
+      </p:sp>
+      <p:sp>
+        <p:nvSpPr>
+          <p:cNvPr id="15" name="TextBox 14">
+            <a:extLst>
+              <a:ext uri="{FF2B5EF4-FFF2-40B4-BE49-F238E27FC236}">
+                <a16:creationId xmlns:a16="http://schemas.microsoft.com/office/drawing/2014/main" id="{4562BE02-97BA-FA21-7568-EE417A31AD54}"/>
+              </a:ext>
+            </a:extLst>
+          </p:cNvPr>
+          <p:cNvSpPr txBox="1"/>
+          <p:nvPr/>
+        </p:nvSpPr>
+        <p:spPr>
+          <a:xfrm>
+            <a:off x="7039353" y="5333567"/>
+            <a:ext cx="4845842" cy="400110"/>
+          </a:xfrm>
+          <a:prstGeom prst="rect">
+            <a:avLst/>
+          </a:prstGeom>
+          <a:noFill/>
+        </p:spPr>
+        <p:txBody>
+          <a:bodyPr wrap="square" rtlCol="0">
+            <a:spAutoFit/>
+          </a:bodyPr>
+          <a:lstStyle/>
+          <a:p>
+            <a:pPr algn="ctr"/>
+            <a:r>
+              <a:rPr lang="en-US" sz="2000" b="1" dirty="0">
+                <a:solidFill>
+                  <a:srgbClr val="F0870F"/>
+                </a:solidFill>
+                <a:latin typeface="Trade Gothic Next Heavy" panose="020B0903040303020004" pitchFamily="34" charset="0"/>
+              </a:rPr>
+              <a:t>Junior Full Stack Software Developer</a:t>
+            </a:r>
+            <a:endParaRPr lang="en-GB" sz="1600" b="1" dirty="0">
+              <a:solidFill>
+                <a:srgbClr val="F0870F"/>
               </a:solidFill>
               <a:latin typeface="Trade Gothic Next Heavy" panose="020B0903040303020004" pitchFamily="34" charset="0"/>
             </a:endParaRPr>

--- a/working_files_and_media/logo_ideas.pptx
+++ b/working_files_and_media/logo_ideas.pptx
@@ -4114,6 +4114,9 @@
           <a:solidFill>
             <a:srgbClr val="404040"/>
           </a:solidFill>
+          <a:ln>
+            <a:noFill/>
+          </a:ln>
         </p:spPr>
         <p:style>
           <a:lnRef idx="2">

--- a/working_files_and_media/logo_ideas.pptx
+++ b/working_files_and_media/logo_ideas.pptx
@@ -370,7 +370,7 @@
           <a:p>
             <a:fld id="{846CE7D5-CF57-46EF-B807-FDD0502418D4}" type="datetimeFigureOut">
               <a:rPr lang="en-US" smtClean="0"/>
-              <a:t>5/17/2025</a:t>
+              <a:t>4/14/2026</a:t>
             </a:fld>
             <a:endParaRPr lang="en-US"/>
           </a:p>
@@ -540,7 +540,7 @@
           <a:p>
             <a:fld id="{846CE7D5-CF57-46EF-B807-FDD0502418D4}" type="datetimeFigureOut">
               <a:rPr lang="en-US" smtClean="0"/>
-              <a:t>5/17/2025</a:t>
+              <a:t>4/14/2026</a:t>
             </a:fld>
             <a:endParaRPr lang="en-US"/>
           </a:p>
@@ -720,7 +720,7 @@
           <a:p>
             <a:fld id="{846CE7D5-CF57-46EF-B807-FDD0502418D4}" type="datetimeFigureOut">
               <a:rPr lang="en-US" smtClean="0"/>
-              <a:t>5/17/2025</a:t>
+              <a:t>4/14/2026</a:t>
             </a:fld>
             <a:endParaRPr lang="en-US"/>
           </a:p>
@@ -890,7 +890,7 @@
           <a:p>
             <a:fld id="{846CE7D5-CF57-46EF-B807-FDD0502418D4}" type="datetimeFigureOut">
               <a:rPr lang="en-US" smtClean="0"/>
-              <a:t>5/17/2025</a:t>
+              <a:t>4/14/2026</a:t>
             </a:fld>
             <a:endParaRPr lang="en-US"/>
           </a:p>
@@ -1136,7 +1136,7 @@
           <a:p>
             <a:fld id="{846CE7D5-CF57-46EF-B807-FDD0502418D4}" type="datetimeFigureOut">
               <a:rPr lang="en-US" smtClean="0"/>
-              <a:t>5/17/2025</a:t>
+              <a:t>4/14/2026</a:t>
             </a:fld>
             <a:endParaRPr lang="en-US"/>
           </a:p>
@@ -1368,7 +1368,7 @@
           <a:p>
             <a:fld id="{846CE7D5-CF57-46EF-B807-FDD0502418D4}" type="datetimeFigureOut">
               <a:rPr lang="en-US" smtClean="0"/>
-              <a:t>5/17/2025</a:t>
+              <a:t>4/14/2026</a:t>
             </a:fld>
             <a:endParaRPr lang="en-US"/>
           </a:p>
@@ -1735,7 +1735,7 @@
           <a:p>
             <a:fld id="{846CE7D5-CF57-46EF-B807-FDD0502418D4}" type="datetimeFigureOut">
               <a:rPr lang="en-US" smtClean="0"/>
-              <a:t>5/17/2025</a:t>
+              <a:t>4/14/2026</a:t>
             </a:fld>
             <a:endParaRPr lang="en-US"/>
           </a:p>
@@ -1853,7 +1853,7 @@
           <a:p>
             <a:fld id="{846CE7D5-CF57-46EF-B807-FDD0502418D4}" type="datetimeFigureOut">
               <a:rPr lang="en-US" smtClean="0"/>
-              <a:t>5/17/2025</a:t>
+              <a:t>4/14/2026</a:t>
             </a:fld>
             <a:endParaRPr lang="en-US"/>
           </a:p>
@@ -1948,7 +1948,7 @@
           <a:p>
             <a:fld id="{846CE7D5-CF57-46EF-B807-FDD0502418D4}" type="datetimeFigureOut">
               <a:rPr lang="en-US" smtClean="0"/>
-              <a:t>5/17/2025</a:t>
+              <a:t>4/14/2026</a:t>
             </a:fld>
             <a:endParaRPr lang="en-US"/>
           </a:p>
@@ -2225,7 +2225,7 @@
           <a:p>
             <a:fld id="{846CE7D5-CF57-46EF-B807-FDD0502418D4}" type="datetimeFigureOut">
               <a:rPr lang="en-US" smtClean="0"/>
-              <a:t>5/17/2025</a:t>
+              <a:t>4/14/2026</a:t>
             </a:fld>
             <a:endParaRPr lang="en-US"/>
           </a:p>
@@ -2482,7 +2482,7 @@
           <a:p>
             <a:fld id="{846CE7D5-CF57-46EF-B807-FDD0502418D4}" type="datetimeFigureOut">
               <a:rPr lang="en-US" smtClean="0"/>
-              <a:t>5/17/2025</a:t>
+              <a:t>4/14/2026</a:t>
             </a:fld>
             <a:endParaRPr lang="en-US"/>
           </a:p>
@@ -2695,7 +2695,7 @@
           <a:p>
             <a:fld id="{846CE7D5-CF57-46EF-B807-FDD0502418D4}" type="datetimeFigureOut">
               <a:rPr lang="en-US" smtClean="0"/>
-              <a:t>5/17/2025</a:t>
+              <a:t>4/14/2026</a:t>
             </a:fld>
             <a:endParaRPr lang="en-US"/>
           </a:p>
@@ -4105,7 +4105,7 @@
         </p:nvSpPr>
         <p:spPr>
           <a:xfrm>
-            <a:off x="7039352" y="4301381"/>
+            <a:off x="6888514" y="3567477"/>
             <a:ext cx="4845843" cy="1448817"/>
           </a:xfrm>
           <a:prstGeom prst="rect">
@@ -4161,7 +4161,7 @@
         </p:nvSpPr>
         <p:spPr>
           <a:xfrm>
-            <a:off x="7039351" y="4517959"/>
+            <a:off x="6888513" y="3784055"/>
             <a:ext cx="4919543" cy="1015663"/>
           </a:xfrm>
           <a:prstGeom prst="rect">
@@ -4208,7 +4208,7 @@
         </p:nvSpPr>
         <p:spPr>
           <a:xfrm>
-            <a:off x="7039353" y="5333567"/>
+            <a:off x="6888515" y="4599663"/>
             <a:ext cx="4845842" cy="400110"/>
           </a:xfrm>
           <a:prstGeom prst="rect">
@@ -4231,6 +4231,156 @@
                 <a:latin typeface="Trade Gothic Next Heavy" panose="020B0903040303020004" pitchFamily="34" charset="0"/>
               </a:rPr>
               <a:t>Junior Full Stack Software Developer</a:t>
+            </a:r>
+            <a:endParaRPr lang="en-GB" sz="1600" b="1" dirty="0">
+              <a:solidFill>
+                <a:srgbClr val="F0870F"/>
+              </a:solidFill>
+              <a:latin typeface="Trade Gothic Next Heavy" panose="020B0903040303020004" pitchFamily="34" charset="0"/>
+            </a:endParaRPr>
+          </a:p>
+        </p:txBody>
+      </p:sp>
+      <p:sp>
+        <p:nvSpPr>
+          <p:cNvPr id="19" name="Rectangle 18">
+            <a:extLst>
+              <a:ext uri="{FF2B5EF4-FFF2-40B4-BE49-F238E27FC236}">
+                <a16:creationId xmlns:a16="http://schemas.microsoft.com/office/drawing/2014/main" id="{46ACAEFB-C797-2BC1-66C0-D1D185651A0D}"/>
+              </a:ext>
+            </a:extLst>
+          </p:cNvPr>
+          <p:cNvSpPr/>
+          <p:nvPr/>
+        </p:nvSpPr>
+        <p:spPr>
+          <a:xfrm>
+            <a:off x="1623222" y="5334311"/>
+            <a:ext cx="7844628" cy="1448817"/>
+          </a:xfrm>
+          <a:prstGeom prst="rect">
+            <a:avLst/>
+          </a:prstGeom>
+          <a:solidFill>
+            <a:srgbClr val="404040"/>
+          </a:solidFill>
+          <a:ln>
+            <a:noFill/>
+          </a:ln>
+        </p:spPr>
+        <p:style>
+          <a:lnRef idx="2">
+            <a:schemeClr val="accent1">
+              <a:shade val="15000"/>
+            </a:schemeClr>
+          </a:lnRef>
+          <a:fillRef idx="1">
+            <a:schemeClr val="accent1"/>
+          </a:fillRef>
+          <a:effectRef idx="0">
+            <a:schemeClr val="accent1"/>
+          </a:effectRef>
+          <a:fontRef idx="minor">
+            <a:schemeClr val="lt1"/>
+          </a:fontRef>
+        </p:style>
+        <p:txBody>
+          <a:bodyPr rtlCol="0" anchor="ctr"/>
+          <a:lstStyle/>
+          <a:p>
+            <a:pPr algn="ctr"/>
+            <a:endParaRPr lang="en-GB">
+              <a:solidFill>
+                <a:srgbClr val="FF0000"/>
+              </a:solidFill>
+            </a:endParaRPr>
+          </a:p>
+        </p:txBody>
+      </p:sp>
+      <p:sp>
+        <p:nvSpPr>
+          <p:cNvPr id="20" name="TextBox 19">
+            <a:extLst>
+              <a:ext uri="{FF2B5EF4-FFF2-40B4-BE49-F238E27FC236}">
+                <a16:creationId xmlns:a16="http://schemas.microsoft.com/office/drawing/2014/main" id="{0743E494-F78D-4379-6550-554AB9833D6F}"/>
+              </a:ext>
+            </a:extLst>
+          </p:cNvPr>
+          <p:cNvSpPr txBox="1"/>
+          <p:nvPr/>
+        </p:nvSpPr>
+        <p:spPr>
+          <a:xfrm>
+            <a:off x="1600154" y="5550145"/>
+            <a:ext cx="7867696" cy="1015663"/>
+          </a:xfrm>
+          <a:prstGeom prst="rect">
+            <a:avLst/>
+          </a:prstGeom>
+          <a:noFill/>
+        </p:spPr>
+        <p:txBody>
+          <a:bodyPr wrap="square" rtlCol="0">
+            <a:spAutoFit/>
+          </a:bodyPr>
+          <a:lstStyle/>
+          <a:p>
+            <a:pPr algn="ctr"/>
+            <a:r>
+              <a:rPr lang="en-US" sz="6000" b="1" dirty="0">
+                <a:solidFill>
+                  <a:srgbClr val="96B946"/>
+                </a:solidFill>
+                <a:latin typeface="Trade Gothic Next Heavy" panose="020B0903040303020004" pitchFamily="34" charset="0"/>
+              </a:rPr>
+              <a:t>Philip Henning</a:t>
+            </a:r>
+            <a:endParaRPr lang="en-GB" b="1" dirty="0">
+              <a:solidFill>
+                <a:srgbClr val="96B946"/>
+              </a:solidFill>
+              <a:latin typeface="Trade Gothic Next Heavy" panose="020B0903040303020004" pitchFamily="34" charset="0"/>
+            </a:endParaRPr>
+          </a:p>
+        </p:txBody>
+      </p:sp>
+      <p:sp>
+        <p:nvSpPr>
+          <p:cNvPr id="21" name="TextBox 20">
+            <a:extLst>
+              <a:ext uri="{FF2B5EF4-FFF2-40B4-BE49-F238E27FC236}">
+                <a16:creationId xmlns:a16="http://schemas.microsoft.com/office/drawing/2014/main" id="{D7A33A9C-86FB-081D-281D-7951AD612B83}"/>
+              </a:ext>
+            </a:extLst>
+          </p:cNvPr>
+          <p:cNvSpPr txBox="1"/>
+          <p:nvPr/>
+        </p:nvSpPr>
+        <p:spPr>
+          <a:xfrm>
+            <a:off x="1600156" y="6365753"/>
+            <a:ext cx="7890762" cy="400110"/>
+          </a:xfrm>
+          <a:prstGeom prst="rect">
+            <a:avLst/>
+          </a:prstGeom>
+          <a:noFill/>
+        </p:spPr>
+        <p:txBody>
+          <a:bodyPr wrap="square" rtlCol="0">
+            <a:spAutoFit/>
+          </a:bodyPr>
+          <a:lstStyle/>
+          <a:p>
+            <a:pPr algn="ctr"/>
+            <a:r>
+              <a:rPr lang="en-US" sz="2000" b="1" dirty="0">
+                <a:solidFill>
+                  <a:srgbClr val="F0870F"/>
+                </a:solidFill>
+                <a:latin typeface="Trade Gothic Next Heavy" panose="020B0903040303020004" pitchFamily="34" charset="0"/>
+              </a:rPr>
+              <a:t>Business Analyst &amp; Junior Full Stack Software Developer</a:t>
             </a:r>
             <a:endParaRPr lang="en-GB" sz="1600" b="1" dirty="0">
               <a:solidFill>

--- a/working_files_and_media/logo_ideas.pptx
+++ b/working_files_and_media/logo_ideas.pptx
@@ -370,7 +370,7 @@
           <a:p>
             <a:fld id="{846CE7D5-CF57-46EF-B807-FDD0502418D4}" type="datetimeFigureOut">
               <a:rPr lang="en-US" smtClean="0"/>
-              <a:t>4/14/2026</a:t>
+              <a:t>4/17/2026</a:t>
             </a:fld>
             <a:endParaRPr lang="en-US"/>
           </a:p>
@@ -540,7 +540,7 @@
           <a:p>
             <a:fld id="{846CE7D5-CF57-46EF-B807-FDD0502418D4}" type="datetimeFigureOut">
               <a:rPr lang="en-US" smtClean="0"/>
-              <a:t>4/14/2026</a:t>
+              <a:t>4/17/2026</a:t>
             </a:fld>
             <a:endParaRPr lang="en-US"/>
           </a:p>
@@ -720,7 +720,7 @@
           <a:p>
             <a:fld id="{846CE7D5-CF57-46EF-B807-FDD0502418D4}" type="datetimeFigureOut">
               <a:rPr lang="en-US" smtClean="0"/>
-              <a:t>4/14/2026</a:t>
+              <a:t>4/17/2026</a:t>
             </a:fld>
             <a:endParaRPr lang="en-US"/>
           </a:p>
@@ -890,7 +890,7 @@
           <a:p>
             <a:fld id="{846CE7D5-CF57-46EF-B807-FDD0502418D4}" type="datetimeFigureOut">
               <a:rPr lang="en-US" smtClean="0"/>
-              <a:t>4/14/2026</a:t>
+              <a:t>4/17/2026</a:t>
             </a:fld>
             <a:endParaRPr lang="en-US"/>
           </a:p>
@@ -1136,7 +1136,7 @@
           <a:p>
             <a:fld id="{846CE7D5-CF57-46EF-B807-FDD0502418D4}" type="datetimeFigureOut">
               <a:rPr lang="en-US" smtClean="0"/>
-              <a:t>4/14/2026</a:t>
+              <a:t>4/17/2026</a:t>
             </a:fld>
             <a:endParaRPr lang="en-US"/>
           </a:p>
@@ -1368,7 +1368,7 @@
           <a:p>
             <a:fld id="{846CE7D5-CF57-46EF-B807-FDD0502418D4}" type="datetimeFigureOut">
               <a:rPr lang="en-US" smtClean="0"/>
-              <a:t>4/14/2026</a:t>
+              <a:t>4/17/2026</a:t>
             </a:fld>
             <a:endParaRPr lang="en-US"/>
           </a:p>
@@ -1735,7 +1735,7 @@
           <a:p>
             <a:fld id="{846CE7D5-CF57-46EF-B807-FDD0502418D4}" type="datetimeFigureOut">
               <a:rPr lang="en-US" smtClean="0"/>
-              <a:t>4/14/2026</a:t>
+              <a:t>4/17/2026</a:t>
             </a:fld>
             <a:endParaRPr lang="en-US"/>
           </a:p>
@@ -1853,7 +1853,7 @@
           <a:p>
             <a:fld id="{846CE7D5-CF57-46EF-B807-FDD0502418D4}" type="datetimeFigureOut">
               <a:rPr lang="en-US" smtClean="0"/>
-              <a:t>4/14/2026</a:t>
+              <a:t>4/17/2026</a:t>
             </a:fld>
             <a:endParaRPr lang="en-US"/>
           </a:p>
@@ -1948,7 +1948,7 @@
           <a:p>
             <a:fld id="{846CE7D5-CF57-46EF-B807-FDD0502418D4}" type="datetimeFigureOut">
               <a:rPr lang="en-US" smtClean="0"/>
-              <a:t>4/14/2026</a:t>
+              <a:t>4/17/2026</a:t>
             </a:fld>
             <a:endParaRPr lang="en-US"/>
           </a:p>
@@ -2225,7 +2225,7 @@
           <a:p>
             <a:fld id="{846CE7D5-CF57-46EF-B807-FDD0502418D4}" type="datetimeFigureOut">
               <a:rPr lang="en-US" smtClean="0"/>
-              <a:t>4/14/2026</a:t>
+              <a:t>4/17/2026</a:t>
             </a:fld>
             <a:endParaRPr lang="en-US"/>
           </a:p>
@@ -2482,7 +2482,7 @@
           <a:p>
             <a:fld id="{846CE7D5-CF57-46EF-B807-FDD0502418D4}" type="datetimeFigureOut">
               <a:rPr lang="en-US" smtClean="0"/>
-              <a:t>4/14/2026</a:t>
+              <a:t>4/17/2026</a:t>
             </a:fld>
             <a:endParaRPr lang="en-US"/>
           </a:p>
@@ -2695,7 +2695,7 @@
           <a:p>
             <a:fld id="{846CE7D5-CF57-46EF-B807-FDD0502418D4}" type="datetimeFigureOut">
               <a:rPr lang="en-US" smtClean="0"/>
-              <a:t>4/14/2026</a:t>
+              <a:t>4/17/2026</a:t>
             </a:fld>
             <a:endParaRPr lang="en-US"/>
           </a:p>
@@ -4241,156 +4241,177 @@
           </a:p>
         </p:txBody>
       </p:sp>
-      <p:sp>
-        <p:nvSpPr>
-          <p:cNvPr id="19" name="Rectangle 18">
+      <p:grpSp>
+        <p:nvGrpSpPr>
+          <p:cNvPr id="16" name="Group 15">
             <a:extLst>
               <a:ext uri="{FF2B5EF4-FFF2-40B4-BE49-F238E27FC236}">
-                <a16:creationId xmlns:a16="http://schemas.microsoft.com/office/drawing/2014/main" id="{46ACAEFB-C797-2BC1-66C0-D1D185651A0D}"/>
+                <a16:creationId xmlns:a16="http://schemas.microsoft.com/office/drawing/2014/main" id="{8EFD5D23-ABF1-34AA-3A7A-1EACF2293645}"/>
               </a:ext>
             </a:extLst>
           </p:cNvPr>
-          <p:cNvSpPr/>
+          <p:cNvGrpSpPr/>
           <p:nvPr/>
-        </p:nvSpPr>
-        <p:spPr>
+        </p:nvGrpSpPr>
+        <p:grpSpPr>
           <a:xfrm>
             <a:off x="1623222" y="5334311"/>
             <a:ext cx="7844628" cy="1448817"/>
-          </a:xfrm>
-          <a:prstGeom prst="rect">
-            <a:avLst/>
-          </a:prstGeom>
-          <a:solidFill>
-            <a:srgbClr val="404040"/>
-          </a:solidFill>
-          <a:ln>
+            <a:chOff x="1623222" y="5334311"/>
+            <a:chExt cx="7844628" cy="1448817"/>
+          </a:xfrm>
+        </p:grpSpPr>
+        <p:sp>
+          <p:nvSpPr>
+            <p:cNvPr id="19" name="Rectangle 18">
+              <a:extLst>
+                <a:ext uri="{FF2B5EF4-FFF2-40B4-BE49-F238E27FC236}">
+                  <a16:creationId xmlns:a16="http://schemas.microsoft.com/office/drawing/2014/main" id="{46ACAEFB-C797-2BC1-66C0-D1D185651A0D}"/>
+                </a:ext>
+              </a:extLst>
+            </p:cNvPr>
+            <p:cNvSpPr/>
+            <p:nvPr/>
+          </p:nvSpPr>
+          <p:spPr>
+            <a:xfrm>
+              <a:off x="1623222" y="5334311"/>
+              <a:ext cx="7844628" cy="1448817"/>
+            </a:xfrm>
+            <a:prstGeom prst="rect">
+              <a:avLst/>
+            </a:prstGeom>
+            <a:solidFill>
+              <a:srgbClr val="404040"/>
+            </a:solidFill>
+            <a:ln>
+              <a:noFill/>
+            </a:ln>
+          </p:spPr>
+          <p:style>
+            <a:lnRef idx="2">
+              <a:schemeClr val="accent1">
+                <a:shade val="15000"/>
+              </a:schemeClr>
+            </a:lnRef>
+            <a:fillRef idx="1">
+              <a:schemeClr val="accent1"/>
+            </a:fillRef>
+            <a:effectRef idx="0">
+              <a:schemeClr val="accent1"/>
+            </a:effectRef>
+            <a:fontRef idx="minor">
+              <a:schemeClr val="lt1"/>
+            </a:fontRef>
+          </p:style>
+          <p:txBody>
+            <a:bodyPr rtlCol="0" anchor="ctr"/>
+            <a:lstStyle/>
+            <a:p>
+              <a:pPr algn="ctr"/>
+              <a:endParaRPr lang="en-GB">
+                <a:solidFill>
+                  <a:srgbClr val="FF0000"/>
+                </a:solidFill>
+              </a:endParaRPr>
+            </a:p>
+          </p:txBody>
+        </p:sp>
+        <p:sp>
+          <p:nvSpPr>
+            <p:cNvPr id="20" name="TextBox 19">
+              <a:extLst>
+                <a:ext uri="{FF2B5EF4-FFF2-40B4-BE49-F238E27FC236}">
+                  <a16:creationId xmlns:a16="http://schemas.microsoft.com/office/drawing/2014/main" id="{0743E494-F78D-4379-6550-554AB9833D6F}"/>
+                </a:ext>
+              </a:extLst>
+            </p:cNvPr>
+            <p:cNvSpPr txBox="1"/>
+            <p:nvPr/>
+          </p:nvSpPr>
+          <p:spPr>
+            <a:xfrm>
+              <a:off x="1623222" y="5454372"/>
+              <a:ext cx="7844628" cy="1015663"/>
+            </a:xfrm>
+            <a:prstGeom prst="rect">
+              <a:avLst/>
+            </a:prstGeom>
             <a:noFill/>
-          </a:ln>
-        </p:spPr>
-        <p:style>
-          <a:lnRef idx="2">
-            <a:schemeClr val="accent1">
-              <a:shade val="15000"/>
-            </a:schemeClr>
-          </a:lnRef>
-          <a:fillRef idx="1">
-            <a:schemeClr val="accent1"/>
-          </a:fillRef>
-          <a:effectRef idx="0">
-            <a:schemeClr val="accent1"/>
-          </a:effectRef>
-          <a:fontRef idx="minor">
-            <a:schemeClr val="lt1"/>
-          </a:fontRef>
-        </p:style>
-        <p:txBody>
-          <a:bodyPr rtlCol="0" anchor="ctr"/>
-          <a:lstStyle/>
-          <a:p>
-            <a:pPr algn="ctr"/>
-            <a:endParaRPr lang="en-GB">
-              <a:solidFill>
-                <a:srgbClr val="FF0000"/>
-              </a:solidFill>
-            </a:endParaRPr>
-          </a:p>
-        </p:txBody>
-      </p:sp>
-      <p:sp>
-        <p:nvSpPr>
-          <p:cNvPr id="20" name="TextBox 19">
-            <a:extLst>
-              <a:ext uri="{FF2B5EF4-FFF2-40B4-BE49-F238E27FC236}">
-                <a16:creationId xmlns:a16="http://schemas.microsoft.com/office/drawing/2014/main" id="{0743E494-F78D-4379-6550-554AB9833D6F}"/>
-              </a:ext>
-            </a:extLst>
-          </p:cNvPr>
-          <p:cNvSpPr txBox="1"/>
-          <p:nvPr/>
-        </p:nvSpPr>
-        <p:spPr>
-          <a:xfrm>
-            <a:off x="1600154" y="5550145"/>
-            <a:ext cx="7867696" cy="1015663"/>
-          </a:xfrm>
-          <a:prstGeom prst="rect">
-            <a:avLst/>
-          </a:prstGeom>
-          <a:noFill/>
-        </p:spPr>
-        <p:txBody>
-          <a:bodyPr wrap="square" rtlCol="0">
-            <a:spAutoFit/>
-          </a:bodyPr>
-          <a:lstStyle/>
-          <a:p>
-            <a:pPr algn="ctr"/>
-            <a:r>
-              <a:rPr lang="en-US" sz="6000" b="1" dirty="0">
+          </p:spPr>
+          <p:txBody>
+            <a:bodyPr wrap="square" rtlCol="0">
+              <a:spAutoFit/>
+            </a:bodyPr>
+            <a:lstStyle/>
+            <a:p>
+              <a:pPr algn="ctr"/>
+              <a:r>
+                <a:rPr lang="en-US" sz="6000" b="1" dirty="0">
+                  <a:solidFill>
+                    <a:srgbClr val="96B946"/>
+                  </a:solidFill>
+                  <a:latin typeface="Trade Gothic Next Heavy" panose="020B0903040303020004" pitchFamily="34" charset="0"/>
+                </a:rPr>
+                <a:t>Philip Henning</a:t>
+              </a:r>
+              <a:endParaRPr lang="en-GB" b="1" dirty="0">
                 <a:solidFill>
                   <a:srgbClr val="96B946"/>
                 </a:solidFill>
                 <a:latin typeface="Trade Gothic Next Heavy" panose="020B0903040303020004" pitchFamily="34" charset="0"/>
-              </a:rPr>
-              <a:t>Philip Henning</a:t>
-            </a:r>
-            <a:endParaRPr lang="en-GB" b="1" dirty="0">
-              <a:solidFill>
-                <a:srgbClr val="96B946"/>
-              </a:solidFill>
-              <a:latin typeface="Trade Gothic Next Heavy" panose="020B0903040303020004" pitchFamily="34" charset="0"/>
-            </a:endParaRPr>
-          </a:p>
-        </p:txBody>
-      </p:sp>
-      <p:sp>
-        <p:nvSpPr>
-          <p:cNvPr id="21" name="TextBox 20">
-            <a:extLst>
-              <a:ext uri="{FF2B5EF4-FFF2-40B4-BE49-F238E27FC236}">
-                <a16:creationId xmlns:a16="http://schemas.microsoft.com/office/drawing/2014/main" id="{D7A33A9C-86FB-081D-281D-7951AD612B83}"/>
-              </a:ext>
-            </a:extLst>
-          </p:cNvPr>
-          <p:cNvSpPr txBox="1"/>
-          <p:nvPr/>
-        </p:nvSpPr>
-        <p:spPr>
-          <a:xfrm>
-            <a:off x="1600156" y="6365753"/>
-            <a:ext cx="7890762" cy="400110"/>
-          </a:xfrm>
-          <a:prstGeom prst="rect">
-            <a:avLst/>
-          </a:prstGeom>
-          <a:noFill/>
-        </p:spPr>
-        <p:txBody>
-          <a:bodyPr wrap="square" rtlCol="0">
-            <a:spAutoFit/>
-          </a:bodyPr>
-          <a:lstStyle/>
-          <a:p>
-            <a:pPr algn="ctr"/>
-            <a:r>
-              <a:rPr lang="en-US" sz="2000" b="1" dirty="0">
+              </a:endParaRPr>
+            </a:p>
+          </p:txBody>
+        </p:sp>
+        <p:sp>
+          <p:nvSpPr>
+            <p:cNvPr id="21" name="TextBox 20">
+              <a:extLst>
+                <a:ext uri="{FF2B5EF4-FFF2-40B4-BE49-F238E27FC236}">
+                  <a16:creationId xmlns:a16="http://schemas.microsoft.com/office/drawing/2014/main" id="{D7A33A9C-86FB-081D-281D-7951AD612B83}"/>
+                </a:ext>
+              </a:extLst>
+            </p:cNvPr>
+            <p:cNvSpPr txBox="1"/>
+            <p:nvPr/>
+          </p:nvSpPr>
+          <p:spPr>
+            <a:xfrm>
+              <a:off x="1623222" y="6365753"/>
+              <a:ext cx="7844628" cy="400110"/>
+            </a:xfrm>
+            <a:prstGeom prst="rect">
+              <a:avLst/>
+            </a:prstGeom>
+            <a:noFill/>
+          </p:spPr>
+          <p:txBody>
+            <a:bodyPr wrap="square" rtlCol="0">
+              <a:spAutoFit/>
+            </a:bodyPr>
+            <a:lstStyle/>
+            <a:p>
+              <a:pPr algn="ctr"/>
+              <a:r>
+                <a:rPr lang="en-US" sz="2000" b="1" dirty="0">
+                  <a:solidFill>
+                    <a:srgbClr val="F0870F"/>
+                  </a:solidFill>
+                  <a:latin typeface="Trade Gothic Next Heavy" panose="020B0903040303020004" pitchFamily="34" charset="0"/>
+                </a:rPr>
+                <a:t>Junior Full Stack Software Developer &amp; Business Analyst</a:t>
+              </a:r>
+              <a:endParaRPr lang="en-GB" sz="2000" b="1" dirty="0">
                 <a:solidFill>
                   <a:srgbClr val="F0870F"/>
                 </a:solidFill>
                 <a:latin typeface="Trade Gothic Next Heavy" panose="020B0903040303020004" pitchFamily="34" charset="0"/>
-              </a:rPr>
-              <a:t>Business Analyst &amp; Junior Full Stack Software Developer</a:t>
-            </a:r>
-            <a:endParaRPr lang="en-GB" sz="1600" b="1" dirty="0">
-              <a:solidFill>
-                <a:srgbClr val="F0870F"/>
-              </a:solidFill>
-              <a:latin typeface="Trade Gothic Next Heavy" panose="020B0903040303020004" pitchFamily="34" charset="0"/>
-            </a:endParaRPr>
-          </a:p>
-        </p:txBody>
-      </p:sp>
+              </a:endParaRPr>
+            </a:p>
+          </p:txBody>
+        </p:sp>
+      </p:grpSp>
     </p:spTree>
     <p:extLst>
       <p:ext uri="{BB962C8B-B14F-4D97-AF65-F5344CB8AC3E}">
